--- a/reports/06-weekly-board.pptx
+++ b/reports/06-weekly-board.pptx
@@ -107,7 +107,7 @@
   <p:extLst>
     <p:ext uri="{521415D9-36F7-43E2-AB2F-B90AF26B5E84}">
       <p14:sectionLst xmlns:p14="http://schemas.microsoft.com/office/powerpoint/2010/main">
-        <p14:section name="Weekly update board" id="{4026003a-06d4-e93e-a578-bd3a075ba3ec}">
+        <p14:section name="Weekly update board" id="{eb2c46e3-b1a5-fc9b-9d8f-5ab8a2d0aeca}">
           <p14:sldIdLst>
             <p14:sldId id="256"/>
           </p14:sldIdLst>
